--- a/examples/recreations/24_Dropbox_technology__HCCS_PrinterInstall_20180206_r0/out_mat2ppt.pptx
+++ b/examples/recreations/24_Dropbox_technology__HCCS_PrinterInstall_20180206_r0/out_mat2ppt.pptx
@@ -3094,9 +3094,57 @@
         <p:nvPr/>
       </p:nvGrpSpPr>
       <p:grpSpPr/>
-      <p:sp>
-        <p:nvSpPr>
-          <p:cNvPr id="2" name="Rectangle 1"/>
+      <p:pic>
+        <p:nvPicPr>
+          <p:cNvPr id="2" name="Picture 1" descr="image2.jpeg"/>
+          <p:cNvPicPr>
+            <a:picLocks noChangeAspect="1"/>
+          </p:cNvPicPr>
+          <p:nvPr/>
+        </p:nvPicPr>
+        <p:blipFill>
+          <a:blip r:embed="rId2"/>
+          <a:stretch>
+            <a:fillRect/>
+          </a:stretch>
+        </p:blipFill>
+        <p:spPr>
+          <a:xfrm>
+            <a:off x="188120" y="5525927"/>
+            <a:ext cx="1143000" cy="1224229"/>
+          </a:xfrm>
+          <a:prstGeom prst="rect">
+            <a:avLst/>
+          </a:prstGeom>
+        </p:spPr>
+      </p:pic>
+      <p:pic>
+        <p:nvPicPr>
+          <p:cNvPr id="3" name="Picture 2" descr="image3.jpg"/>
+          <p:cNvPicPr>
+            <a:picLocks noChangeAspect="1"/>
+          </p:cNvPicPr>
+          <p:nvPr/>
+        </p:nvPicPr>
+        <p:blipFill>
+          <a:blip r:embed="rId3"/>
+          <a:stretch>
+            <a:fillRect/>
+          </a:stretch>
+        </p:blipFill>
+        <p:spPr>
+          <a:xfrm>
+            <a:off x="10638880" y="139366"/>
+            <a:ext cx="1410420" cy="1371600"/>
+          </a:xfrm>
+          <a:prstGeom prst="rect">
+            <a:avLst/>
+          </a:prstGeom>
+        </p:spPr>
+      </p:pic>
+      <p:sp>
+        <p:nvSpPr>
+          <p:cNvPr id="4" name="Rectangle 3"/>
           <p:cNvSpPr/>
           <p:nvPr/>
         </p:nvSpPr>
@@ -3135,7 +3183,7 @@
       </p:sp>
       <p:sp>
         <p:nvSpPr>
-          <p:cNvPr id="3" name="Rectangle 2"/>
+          <p:cNvPr id="5" name="Rectangle 4"/>
           <p:cNvSpPr/>
           <p:nvPr/>
         </p:nvSpPr>
@@ -3190,6 +3238,132 @@
         <p:nvPr/>
       </p:nvGrpSpPr>
       <p:grpSpPr/>
+      <p:pic>
+        <p:nvPicPr>
+          <p:cNvPr id="2" name="Picture 1" descr="image2.jpeg"/>
+          <p:cNvPicPr>
+            <a:picLocks noChangeAspect="1"/>
+          </p:cNvPicPr>
+          <p:nvPr/>
+        </p:nvPicPr>
+        <p:blipFill>
+          <a:blip r:embed="rId2"/>
+          <a:stretch>
+            <a:fillRect/>
+          </a:stretch>
+        </p:blipFill>
+        <p:spPr>
+          <a:xfrm>
+            <a:off x="188120" y="5525927"/>
+            <a:ext cx="1143000" cy="1224229"/>
+          </a:xfrm>
+          <a:prstGeom prst="rect">
+            <a:avLst/>
+          </a:prstGeom>
+        </p:spPr>
+      </p:pic>
+      <p:pic>
+        <p:nvPicPr>
+          <p:cNvPr id="3" name="Picture 2" descr="image3.jpg"/>
+          <p:cNvPicPr>
+            <a:picLocks noChangeAspect="1"/>
+          </p:cNvPicPr>
+          <p:nvPr/>
+        </p:nvPicPr>
+        <p:blipFill>
+          <a:blip r:embed="rId3"/>
+          <a:stretch>
+            <a:fillRect/>
+          </a:stretch>
+        </p:blipFill>
+        <p:spPr>
+          <a:xfrm>
+            <a:off x="10638880" y="139366"/>
+            <a:ext cx="1410420" cy="1371600"/>
+          </a:xfrm>
+          <a:prstGeom prst="rect">
+            <a:avLst/>
+          </a:prstGeom>
+        </p:spPr>
+      </p:pic>
+      <p:sp>
+        <p:nvSpPr>
+          <p:cNvPr id="4" name="Rectangle 3"/>
+          <p:cNvSpPr/>
+          <p:nvPr/>
+        </p:nvSpPr>
+        <p:spPr>
+          <a:xfrm>
+            <a:off x="838200" y="365125"/>
+            <a:ext cx="10515600" cy="1325563"/>
+          </a:xfrm>
+          <a:prstGeom prst="rect">
+            <a:avLst/>
+          </a:prstGeom>
+        </p:spPr>
+        <p:style>
+          <a:lnRef idx="1">
+            <a:schemeClr val="accent1"/>
+          </a:lnRef>
+          <a:fillRef idx="3">
+            <a:schemeClr val="accent1"/>
+          </a:fillRef>
+          <a:effectRef idx="2">
+            <a:schemeClr val="accent1"/>
+          </a:effectRef>
+          <a:fontRef idx="minor">
+            <a:schemeClr val="lt1"/>
+          </a:fontRef>
+        </p:style>
+        <p:txBody>
+          <a:bodyPr rtlCol="0" anchor="ctr"/>
+          <a:lstStyle/>
+          <a:p>
+            <a:r>
+              <a:t>Overview</a:t>
+            </a:r>
+          </a:p>
+        </p:txBody>
+      </p:sp>
+      <p:sp>
+        <p:nvSpPr>
+          <p:cNvPr id="5" name="Rectangle 4"/>
+          <p:cNvSpPr/>
+          <p:nvPr/>
+        </p:nvSpPr>
+        <p:spPr>
+          <a:xfrm>
+            <a:off x="838200" y="365125"/>
+            <a:ext cx="10515600" cy="1325563"/>
+          </a:xfrm>
+          <a:prstGeom prst="rect">
+            <a:avLst/>
+          </a:prstGeom>
+        </p:spPr>
+        <p:style>
+          <a:lnRef idx="1">
+            <a:schemeClr val="accent1"/>
+          </a:lnRef>
+          <a:fillRef idx="3">
+            <a:schemeClr val="accent1"/>
+          </a:fillRef>
+          <a:effectRef idx="2">
+            <a:schemeClr val="accent1"/>
+          </a:effectRef>
+          <a:fontRef idx="minor">
+            <a:schemeClr val="lt1"/>
+          </a:fontRef>
+        </p:style>
+        <p:txBody>
+          <a:bodyPr rtlCol="0" anchor="ctr"/>
+          <a:lstStyle/>
+          <a:p>
+            <a:r>
+              <a:t>Description of Current PrintersPrinter Installation Instructions</a:t>
+            </a:r>
+          </a:p>
+        </p:txBody>
+      </p:sp>
     </p:spTree>
   </p:cSld>
   <p:clrMapOvr>
@@ -3208,9 +3382,96 @@
         <p:nvPr/>
       </p:nvGrpSpPr>
       <p:grpSpPr/>
-      <p:sp>
-        <p:nvSpPr>
-          <p:cNvPr id="2" name="Rectangle 1"/>
+      <p:pic>
+        <p:nvPicPr>
+          <p:cNvPr id="2" name="Picture 1" descr="image2.jpeg"/>
+          <p:cNvPicPr>
+            <a:picLocks noChangeAspect="1"/>
+          </p:cNvPicPr>
+          <p:nvPr/>
+        </p:nvPicPr>
+        <p:blipFill>
+          <a:blip r:embed="rId2"/>
+          <a:stretch>
+            <a:fillRect/>
+          </a:stretch>
+        </p:blipFill>
+        <p:spPr>
+          <a:xfrm>
+            <a:off x="188120" y="5525927"/>
+            <a:ext cx="1143000" cy="1224229"/>
+          </a:xfrm>
+          <a:prstGeom prst="rect">
+            <a:avLst/>
+          </a:prstGeom>
+        </p:spPr>
+      </p:pic>
+      <p:pic>
+        <p:nvPicPr>
+          <p:cNvPr id="3" name="Picture 2" descr="image3.jpg"/>
+          <p:cNvPicPr>
+            <a:picLocks noChangeAspect="1"/>
+          </p:cNvPicPr>
+          <p:nvPr/>
+        </p:nvPicPr>
+        <p:blipFill>
+          <a:blip r:embed="rId3"/>
+          <a:stretch>
+            <a:fillRect/>
+          </a:stretch>
+        </p:blipFill>
+        <p:spPr>
+          <a:xfrm>
+            <a:off x="10638880" y="139366"/>
+            <a:ext cx="1410420" cy="1371600"/>
+          </a:xfrm>
+          <a:prstGeom prst="rect">
+            <a:avLst/>
+          </a:prstGeom>
+        </p:spPr>
+      </p:pic>
+      <p:sp>
+        <p:nvSpPr>
+          <p:cNvPr id="4" name="Rectangle 3"/>
+          <p:cNvSpPr/>
+          <p:nvPr/>
+        </p:nvSpPr>
+        <p:spPr>
+          <a:xfrm>
+            <a:off x="838200" y="365125"/>
+            <a:ext cx="10515600" cy="1325563"/>
+          </a:xfrm>
+          <a:prstGeom prst="rect">
+            <a:avLst/>
+          </a:prstGeom>
+        </p:spPr>
+        <p:style>
+          <a:lnRef idx="1">
+            <a:schemeClr val="accent1"/>
+          </a:lnRef>
+          <a:fillRef idx="3">
+            <a:schemeClr val="accent1"/>
+          </a:fillRef>
+          <a:effectRef idx="2">
+            <a:schemeClr val="accent1"/>
+          </a:effectRef>
+          <a:fontRef idx="minor">
+            <a:schemeClr val="lt1"/>
+          </a:fontRef>
+        </p:style>
+        <p:txBody>
+          <a:bodyPr rtlCol="0" anchor="ctr"/>
+          <a:lstStyle/>
+          <a:p>
+            <a:r>
+              <a:t>Current Printers</a:t>
+            </a:r>
+          </a:p>
+        </p:txBody>
+      </p:sp>
+      <p:sp>
+        <p:nvSpPr>
+          <p:cNvPr id="5" name="Rectangle 4"/>
           <p:cNvSpPr/>
           <p:nvPr/>
         </p:nvSpPr>
@@ -3265,9 +3526,57 @@
         <p:nvPr/>
       </p:nvGrpSpPr>
       <p:grpSpPr/>
-      <p:sp>
-        <p:nvSpPr>
-          <p:cNvPr id="2" name="Rectangle 1"/>
+      <p:pic>
+        <p:nvPicPr>
+          <p:cNvPr id="2" name="Picture 1" descr="image2.jpeg"/>
+          <p:cNvPicPr>
+            <a:picLocks noChangeAspect="1"/>
+          </p:cNvPicPr>
+          <p:nvPr/>
+        </p:nvPicPr>
+        <p:blipFill>
+          <a:blip r:embed="rId2"/>
+          <a:stretch>
+            <a:fillRect/>
+          </a:stretch>
+        </p:blipFill>
+        <p:spPr>
+          <a:xfrm>
+            <a:off x="188120" y="5525927"/>
+            <a:ext cx="1143000" cy="1224229"/>
+          </a:xfrm>
+          <a:prstGeom prst="rect">
+            <a:avLst/>
+          </a:prstGeom>
+        </p:spPr>
+      </p:pic>
+      <p:pic>
+        <p:nvPicPr>
+          <p:cNvPr id="3" name="Picture 2" descr="image3.jpg"/>
+          <p:cNvPicPr>
+            <a:picLocks noChangeAspect="1"/>
+          </p:cNvPicPr>
+          <p:nvPr/>
+        </p:nvPicPr>
+        <p:blipFill>
+          <a:blip r:embed="rId3"/>
+          <a:stretch>
+            <a:fillRect/>
+          </a:stretch>
+        </p:blipFill>
+        <p:spPr>
+          <a:xfrm>
+            <a:off x="10638880" y="139366"/>
+            <a:ext cx="1410420" cy="1371600"/>
+          </a:xfrm>
+          <a:prstGeom prst="rect">
+            <a:avLst/>
+          </a:prstGeom>
+        </p:spPr>
+      </p:pic>
+      <p:sp>
+        <p:nvSpPr>
+          <p:cNvPr id="4" name="Rectangle 3"/>
           <p:cNvSpPr/>
           <p:nvPr/>
         </p:nvSpPr>
@@ -3306,7 +3615,7 @@
       </p:sp>
       <p:sp>
         <p:nvSpPr>
-          <p:cNvPr id="3" name="Rectangle 2"/>
+          <p:cNvPr id="5" name="Rectangle 4"/>
           <p:cNvSpPr/>
           <p:nvPr/>
         </p:nvSpPr>
@@ -3361,9 +3670,57 @@
         <p:nvPr/>
       </p:nvGrpSpPr>
       <p:grpSpPr/>
-      <p:sp>
-        <p:nvSpPr>
-          <p:cNvPr id="2" name="Rectangle 1"/>
+      <p:pic>
+        <p:nvPicPr>
+          <p:cNvPr id="2" name="Picture 1" descr="image2.jpeg"/>
+          <p:cNvPicPr>
+            <a:picLocks noChangeAspect="1"/>
+          </p:cNvPicPr>
+          <p:nvPr/>
+        </p:nvPicPr>
+        <p:blipFill>
+          <a:blip r:embed="rId2"/>
+          <a:stretch>
+            <a:fillRect/>
+          </a:stretch>
+        </p:blipFill>
+        <p:spPr>
+          <a:xfrm>
+            <a:off x="188120" y="5525927"/>
+            <a:ext cx="1143000" cy="1224229"/>
+          </a:xfrm>
+          <a:prstGeom prst="rect">
+            <a:avLst/>
+          </a:prstGeom>
+        </p:spPr>
+      </p:pic>
+      <p:pic>
+        <p:nvPicPr>
+          <p:cNvPr id="3" name="Picture 2" descr="image3.jpg"/>
+          <p:cNvPicPr>
+            <a:picLocks noChangeAspect="1"/>
+          </p:cNvPicPr>
+          <p:nvPr/>
+        </p:nvPicPr>
+        <p:blipFill>
+          <a:blip r:embed="rId3"/>
+          <a:stretch>
+            <a:fillRect/>
+          </a:stretch>
+        </p:blipFill>
+        <p:spPr>
+          <a:xfrm>
+            <a:off x="10638880" y="139366"/>
+            <a:ext cx="1410420" cy="1371600"/>
+          </a:xfrm>
+          <a:prstGeom prst="rect">
+            <a:avLst/>
+          </a:prstGeom>
+        </p:spPr>
+      </p:pic>
+      <p:sp>
+        <p:nvSpPr>
+          <p:cNvPr id="4" name="Rectangle 3"/>
           <p:cNvSpPr/>
           <p:nvPr/>
         </p:nvSpPr>
@@ -3402,7 +3759,7 @@
       </p:sp>
       <p:sp>
         <p:nvSpPr>
-          <p:cNvPr id="3" name="Rectangle 2"/>
+          <p:cNvPr id="5" name="Rectangle 4"/>
           <p:cNvSpPr/>
           <p:nvPr/>
         </p:nvSpPr>
@@ -3436,6 +3793,67 @@
             <a:r>
               <a:t>Control Panel -&gt; Devices and printersAdd a printer Add a Local Printer</a:t>
             </a:r>
+          </a:p>
+        </p:txBody>
+      </p:sp>
+      <p:pic>
+        <p:nvPicPr>
+          <p:cNvPr id="6" name="Picture 5" descr="image4.png"/>
+          <p:cNvPicPr>
+            <a:picLocks noChangeAspect="1"/>
+          </p:cNvPicPr>
+          <p:nvPr/>
+        </p:nvPicPr>
+        <p:blipFill>
+          <a:blip r:embed="rId4"/>
+          <a:stretch>
+            <a:fillRect/>
+          </a:stretch>
+        </p:blipFill>
+        <p:spPr>
+          <a:xfrm>
+            <a:off x="4442569" y="2920610"/>
+            <a:ext cx="6390009" cy="4244119"/>
+          </a:xfrm>
+          <a:prstGeom prst="rect">
+            <a:avLst/>
+          </a:prstGeom>
+        </p:spPr>
+      </p:pic>
+      <p:sp>
+        <p:nvSpPr>
+          <p:cNvPr id="7" name="Rectangle 6"/>
+          <p:cNvSpPr/>
+          <p:nvPr/>
+        </p:nvSpPr>
+        <p:spPr>
+          <a:xfrm>
+            <a:off x="5306752" y="3566567"/>
+            <a:ext cx="647700" cy="202181"/>
+          </a:xfrm>
+          <a:prstGeom prst="rect">
+            <a:avLst/>
+          </a:prstGeom>
+        </p:spPr>
+        <p:style>
+          <a:lnRef idx="1">
+            <a:schemeClr val="accent1"/>
+          </a:lnRef>
+          <a:fillRef idx="3">
+            <a:schemeClr val="accent1"/>
+          </a:fillRef>
+          <a:effectRef idx="2">
+            <a:schemeClr val="accent1"/>
+          </a:effectRef>
+          <a:fontRef idx="minor">
+            <a:schemeClr val="lt1"/>
+          </a:fontRef>
+        </p:style>
+        <p:txBody>
+          <a:bodyPr rtlCol="0" anchor="ctr"/>
+          <a:lstStyle/>
+          <a:p>
+            <a:pPr algn="ctr"/>
           </a:p>
         </p:txBody>
       </p:sp>
@@ -3457,87 +3875,9 @@
         <p:nvPr/>
       </p:nvGrpSpPr>
       <p:grpSpPr/>
-      <p:sp>
-        <p:nvSpPr>
-          <p:cNvPr id="2" name="Rectangle 1"/>
-          <p:cNvSpPr/>
-          <p:nvPr/>
-        </p:nvSpPr>
-        <p:spPr>
-          <a:xfrm>
-            <a:off x="535021" y="365125"/>
-            <a:ext cx="10090538" cy="659559"/>
-          </a:xfrm>
-          <a:prstGeom prst="rect">
-            <a:avLst/>
-          </a:prstGeom>
-        </p:spPr>
-        <p:style>
-          <a:lnRef idx="1">
-            <a:schemeClr val="accent1"/>
-          </a:lnRef>
-          <a:fillRef idx="3">
-            <a:schemeClr val="accent1"/>
-          </a:fillRef>
-          <a:effectRef idx="2">
-            <a:schemeClr val="accent1"/>
-          </a:effectRef>
-          <a:fontRef idx="minor">
-            <a:schemeClr val="lt1"/>
-          </a:fontRef>
-        </p:style>
-        <p:txBody>
-          <a:bodyPr rtlCol="0" anchor="ctr"/>
-          <a:lstStyle/>
-          <a:p>
-            <a:r>
-              <a:t>Installing a Network Printer Using TCP/IP (3/4)</a:t>
-            </a:r>
-          </a:p>
-        </p:txBody>
-      </p:sp>
-      <p:sp>
-        <p:nvSpPr>
-          <p:cNvPr id="3" name="Rectangle 2"/>
-          <p:cNvSpPr/>
-          <p:nvPr/>
-        </p:nvSpPr>
-        <p:spPr>
-          <a:xfrm>
-            <a:off x="188121" y="1222110"/>
-            <a:ext cx="11651454" cy="4954853"/>
-          </a:xfrm>
-          <a:prstGeom prst="rect">
-            <a:avLst/>
-          </a:prstGeom>
-        </p:spPr>
-        <p:style>
-          <a:lnRef idx="1">
-            <a:schemeClr val="accent1"/>
-          </a:lnRef>
-          <a:fillRef idx="3">
-            <a:schemeClr val="accent1"/>
-          </a:fillRef>
-          <a:effectRef idx="2">
-            <a:schemeClr val="accent1"/>
-          </a:effectRef>
-          <a:fontRef idx="minor">
-            <a:schemeClr val="lt1"/>
-          </a:fontRef>
-        </p:style>
-        <p:txBody>
-          <a:bodyPr rtlCol="0" anchor="ctr"/>
-          <a:lstStyle/>
-          <a:p>
-            <a:r>
-              <a:t>Add a Local PrinterCreate a New PortSelect Type of Port: Standard TCP/IP Port</a:t>
-            </a:r>
-          </a:p>
-        </p:txBody>
-      </p:sp>
       <p:pic>
         <p:nvPicPr>
-          <p:cNvPr id="4" name="Picture 3" descr="image5.png"/>
+          <p:cNvPr id="2" name="Picture 1" descr="image2.jpeg"/>
           <p:cNvPicPr>
             <a:picLocks noChangeAspect="1"/>
           </p:cNvPicPr>
@@ -3551,8 +3891,8 @@
         </p:blipFill>
         <p:spPr>
           <a:xfrm>
-            <a:off x="1829470" y="2597969"/>
-            <a:ext cx="4593021" cy="3364315"/>
+            <a:off x="188120" y="5525927"/>
+            <a:ext cx="1143000" cy="1224229"/>
           </a:xfrm>
           <a:prstGeom prst="rect">
             <a:avLst/>
@@ -3561,7 +3901,7 @@
       </p:pic>
       <p:pic>
         <p:nvPicPr>
-          <p:cNvPr id="5" name="Picture 4" descr="image6.png"/>
+          <p:cNvPr id="3" name="Picture 2" descr="image3.jpg"/>
           <p:cNvPicPr>
             <a:picLocks noChangeAspect="1"/>
           </p:cNvPicPr>
@@ -3569,6 +3909,132 @@
         </p:nvPicPr>
         <p:blipFill>
           <a:blip r:embed="rId3"/>
+          <a:stretch>
+            <a:fillRect/>
+          </a:stretch>
+        </p:blipFill>
+        <p:spPr>
+          <a:xfrm>
+            <a:off x="10638880" y="139366"/>
+            <a:ext cx="1410420" cy="1371600"/>
+          </a:xfrm>
+          <a:prstGeom prst="rect">
+            <a:avLst/>
+          </a:prstGeom>
+        </p:spPr>
+      </p:pic>
+      <p:sp>
+        <p:nvSpPr>
+          <p:cNvPr id="4" name="Rectangle 3"/>
+          <p:cNvSpPr/>
+          <p:nvPr/>
+        </p:nvSpPr>
+        <p:spPr>
+          <a:xfrm>
+            <a:off x="535021" y="365125"/>
+            <a:ext cx="10090538" cy="659559"/>
+          </a:xfrm>
+          <a:prstGeom prst="rect">
+            <a:avLst/>
+          </a:prstGeom>
+        </p:spPr>
+        <p:style>
+          <a:lnRef idx="1">
+            <a:schemeClr val="accent1"/>
+          </a:lnRef>
+          <a:fillRef idx="3">
+            <a:schemeClr val="accent1"/>
+          </a:fillRef>
+          <a:effectRef idx="2">
+            <a:schemeClr val="accent1"/>
+          </a:effectRef>
+          <a:fontRef idx="minor">
+            <a:schemeClr val="lt1"/>
+          </a:fontRef>
+        </p:style>
+        <p:txBody>
+          <a:bodyPr rtlCol="0" anchor="ctr"/>
+          <a:lstStyle/>
+          <a:p>
+            <a:r>
+              <a:t>Installing a Network Printer Using TCP/IP (3/4)</a:t>
+            </a:r>
+          </a:p>
+        </p:txBody>
+      </p:sp>
+      <p:sp>
+        <p:nvSpPr>
+          <p:cNvPr id="5" name="Rectangle 4"/>
+          <p:cNvSpPr/>
+          <p:nvPr/>
+        </p:nvSpPr>
+        <p:spPr>
+          <a:xfrm>
+            <a:off x="188121" y="1222110"/>
+            <a:ext cx="11651454" cy="4954853"/>
+          </a:xfrm>
+          <a:prstGeom prst="rect">
+            <a:avLst/>
+          </a:prstGeom>
+        </p:spPr>
+        <p:style>
+          <a:lnRef idx="1">
+            <a:schemeClr val="accent1"/>
+          </a:lnRef>
+          <a:fillRef idx="3">
+            <a:schemeClr val="accent1"/>
+          </a:fillRef>
+          <a:effectRef idx="2">
+            <a:schemeClr val="accent1"/>
+          </a:effectRef>
+          <a:fontRef idx="minor">
+            <a:schemeClr val="lt1"/>
+          </a:fontRef>
+        </p:style>
+        <p:txBody>
+          <a:bodyPr rtlCol="0" anchor="ctr"/>
+          <a:lstStyle/>
+          <a:p>
+            <a:r>
+              <a:t>Add a Local PrinterCreate a New PortSelect Type of Port: Standard TCP/IP Port</a:t>
+            </a:r>
+          </a:p>
+        </p:txBody>
+      </p:sp>
+      <p:pic>
+        <p:nvPicPr>
+          <p:cNvPr id="6" name="Picture 5" descr="image5.png"/>
+          <p:cNvPicPr>
+            <a:picLocks noChangeAspect="1"/>
+          </p:cNvPicPr>
+          <p:nvPr/>
+        </p:nvPicPr>
+        <p:blipFill>
+          <a:blip r:embed="rId4"/>
+          <a:stretch>
+            <a:fillRect/>
+          </a:stretch>
+        </p:blipFill>
+        <p:spPr>
+          <a:xfrm>
+            <a:off x="1829470" y="2597969"/>
+            <a:ext cx="4593021" cy="3364315"/>
+          </a:xfrm>
+          <a:prstGeom prst="rect">
+            <a:avLst/>
+          </a:prstGeom>
+        </p:spPr>
+      </p:pic>
+      <p:pic>
+        <p:nvPicPr>
+          <p:cNvPr id="7" name="Picture 6" descr="image6.png"/>
+          <p:cNvPicPr>
+            <a:picLocks noChangeAspect="1"/>
+          </p:cNvPicPr>
+          <p:nvPr/>
+        </p:nvPicPr>
+        <p:blipFill>
+          <a:blip r:embed="rId5"/>
           <a:stretch>
             <a:fillRect/>
           </a:stretch>
@@ -3601,87 +4067,9 @@
         <p:nvPr/>
       </p:nvGrpSpPr>
       <p:grpSpPr/>
-      <p:sp>
-        <p:nvSpPr>
-          <p:cNvPr id="2" name="Rectangle 1"/>
-          <p:cNvSpPr/>
-          <p:nvPr/>
-        </p:nvSpPr>
-        <p:spPr>
-          <a:xfrm>
-            <a:off x="535021" y="365125"/>
-            <a:ext cx="10021090" cy="659559"/>
-          </a:xfrm>
-          <a:prstGeom prst="rect">
-            <a:avLst/>
-          </a:prstGeom>
-        </p:spPr>
-        <p:style>
-          <a:lnRef idx="1">
-            <a:schemeClr val="accent1"/>
-          </a:lnRef>
-          <a:fillRef idx="3">
-            <a:schemeClr val="accent1"/>
-          </a:fillRef>
-          <a:effectRef idx="2">
-            <a:schemeClr val="accent1"/>
-          </a:effectRef>
-          <a:fontRef idx="minor">
-            <a:schemeClr val="lt1"/>
-          </a:fontRef>
-        </p:style>
-        <p:txBody>
-          <a:bodyPr rtlCol="0" anchor="ctr"/>
-          <a:lstStyle/>
-          <a:p>
-            <a:r>
-              <a:t>Installing a Network Printer Using TCP/IP (4/4)</a:t>
-            </a:r>
-          </a:p>
-        </p:txBody>
-      </p:sp>
-      <p:sp>
-        <p:nvSpPr>
-          <p:cNvPr id="3" name="Rectangle 2"/>
-          <p:cNvSpPr/>
-          <p:nvPr/>
-        </p:nvSpPr>
-        <p:spPr>
-          <a:xfrm>
-            <a:off x="188121" y="1222110"/>
-            <a:ext cx="11651454" cy="4954853"/>
-          </a:xfrm>
-          <a:prstGeom prst="rect">
-            <a:avLst/>
-          </a:prstGeom>
-        </p:spPr>
-        <p:style>
-          <a:lnRef idx="1">
-            <a:schemeClr val="accent1"/>
-          </a:lnRef>
-          <a:fillRef idx="3">
-            <a:schemeClr val="accent1"/>
-          </a:fillRef>
-          <a:effectRef idx="2">
-            <a:schemeClr val="accent1"/>
-          </a:effectRef>
-          <a:fontRef idx="minor">
-            <a:schemeClr val="lt1"/>
-          </a:fontRef>
-        </p:style>
-        <p:txBody>
-          <a:bodyPr rtlCol="0" anchor="ctr"/>
-          <a:lstStyle/>
-          <a:p>
-            <a:r>
-              <a:t>Type IP Address in Hostname or IP address: 192.168.1.##Installing the Printer Driver Add Printer -&gt; Have Disk</a:t>
-            </a:r>
-          </a:p>
-        </p:txBody>
-      </p:sp>
       <p:pic>
         <p:nvPicPr>
-          <p:cNvPr id="4" name="Picture 3" descr="image7.png"/>
+          <p:cNvPr id="2" name="Picture 1" descr="image2.jpeg"/>
           <p:cNvPicPr>
             <a:picLocks noChangeAspect="1"/>
           </p:cNvPicPr>
@@ -3695,8 +4083,8 @@
         </p:blipFill>
         <p:spPr>
           <a:xfrm>
-            <a:off x="1452793" y="2338086"/>
-            <a:ext cx="4994305" cy="3658249"/>
+            <a:off x="188120" y="5525927"/>
+            <a:ext cx="1143000" cy="1224229"/>
           </a:xfrm>
           <a:prstGeom prst="rect">
             <a:avLst/>
@@ -3705,7 +4093,7 @@
       </p:pic>
       <p:pic>
         <p:nvPicPr>
-          <p:cNvPr id="5" name="Picture 4" descr="image8.png"/>
+          <p:cNvPr id="3" name="Picture 2" descr="image3.jpg"/>
           <p:cNvPicPr>
             <a:picLocks noChangeAspect="1"/>
           </p:cNvPicPr>
@@ -3719,8 +4107,8 @@
         </p:blipFill>
         <p:spPr>
           <a:xfrm>
-            <a:off x="6744113" y="2338086"/>
-            <a:ext cx="4994305" cy="3658249"/>
+            <a:off x="10638880" y="139366"/>
+            <a:ext cx="1410420" cy="1371600"/>
           </a:xfrm>
           <a:prstGeom prst="rect">
             <a:avLst/>
@@ -3729,14 +4117,14 @@
       </p:pic>
       <p:sp>
         <p:nvSpPr>
-          <p:cNvPr id="6" name="Rectangle 5"/>
+          <p:cNvPr id="4" name="Rectangle 3"/>
           <p:cNvSpPr/>
           <p:nvPr/>
         </p:nvSpPr>
         <p:spPr>
           <a:xfrm>
-            <a:off x="10556111" y="5023414"/>
-            <a:ext cx="983848" cy="289366"/>
+            <a:off x="535021" y="365125"/>
+            <a:ext cx="10021090" cy="659559"/>
           </a:xfrm>
           <a:prstGeom prst="rect">
             <a:avLst/>
@@ -3760,20 +4148,22 @@
           <a:bodyPr rtlCol="0" anchor="ctr"/>
           <a:lstStyle/>
           <a:p>
-            <a:pPr algn="ctr"/>
-          </a:p>
-        </p:txBody>
-      </p:sp>
-      <p:sp>
-        <p:nvSpPr>
-          <p:cNvPr id="7" name="Rectangle 6"/>
+            <a:r>
+              <a:t>Installing a Network Printer Using TCP/IP (4/4)</a:t>
+            </a:r>
+          </a:p>
+        </p:txBody>
+      </p:sp>
+      <p:sp>
+        <p:nvSpPr>
+          <p:cNvPr id="5" name="Rectangle 4"/>
           <p:cNvSpPr/>
           <p:nvPr/>
         </p:nvSpPr>
         <p:spPr>
           <a:xfrm>
-            <a:off x="3221619" y="3981690"/>
-            <a:ext cx="3028709" cy="212527"/>
+            <a:off x="188121" y="1222110"/>
+            <a:ext cx="11651454" cy="4954853"/>
           </a:xfrm>
           <a:prstGeom prst="rect">
             <a:avLst/>
@@ -3797,13 +4187,137 @@
           <a:bodyPr rtlCol="0" anchor="ctr"/>
           <a:lstStyle/>
           <a:p>
+            <a:r>
+              <a:t>Type IP Address in Hostname or IP address: 192.168.1.##Installing the Printer Driver Add Printer -&gt; Have Disk</a:t>
+            </a:r>
+          </a:p>
+        </p:txBody>
+      </p:sp>
+      <p:pic>
+        <p:nvPicPr>
+          <p:cNvPr id="6" name="Picture 5" descr="image7.png"/>
+          <p:cNvPicPr>
+            <a:picLocks noChangeAspect="1"/>
+          </p:cNvPicPr>
+          <p:nvPr/>
+        </p:nvPicPr>
+        <p:blipFill>
+          <a:blip r:embed="rId4"/>
+          <a:stretch>
+            <a:fillRect/>
+          </a:stretch>
+        </p:blipFill>
+        <p:spPr>
+          <a:xfrm>
+            <a:off x="1452793" y="2338086"/>
+            <a:ext cx="4994305" cy="3658249"/>
+          </a:xfrm>
+          <a:prstGeom prst="rect">
+            <a:avLst/>
+          </a:prstGeom>
+        </p:spPr>
+      </p:pic>
+      <p:pic>
+        <p:nvPicPr>
+          <p:cNvPr id="7" name="Picture 6" descr="image8.png"/>
+          <p:cNvPicPr>
+            <a:picLocks noChangeAspect="1"/>
+          </p:cNvPicPr>
+          <p:nvPr/>
+        </p:nvPicPr>
+        <p:blipFill>
+          <a:blip r:embed="rId5"/>
+          <a:stretch>
+            <a:fillRect/>
+          </a:stretch>
+        </p:blipFill>
+        <p:spPr>
+          <a:xfrm>
+            <a:off x="6744113" y="2338086"/>
+            <a:ext cx="4994305" cy="3658249"/>
+          </a:xfrm>
+          <a:prstGeom prst="rect">
+            <a:avLst/>
+          </a:prstGeom>
+        </p:spPr>
+      </p:pic>
+      <p:sp>
+        <p:nvSpPr>
+          <p:cNvPr id="8" name="Rectangle 7"/>
+          <p:cNvSpPr/>
+          <p:nvPr/>
+        </p:nvSpPr>
+        <p:spPr>
+          <a:xfrm>
+            <a:off x="10556111" y="5023414"/>
+            <a:ext cx="983848" cy="289366"/>
+          </a:xfrm>
+          <a:prstGeom prst="rect">
+            <a:avLst/>
+          </a:prstGeom>
+        </p:spPr>
+        <p:style>
+          <a:lnRef idx="1">
+            <a:schemeClr val="accent1"/>
+          </a:lnRef>
+          <a:fillRef idx="3">
+            <a:schemeClr val="accent1"/>
+          </a:fillRef>
+          <a:effectRef idx="2">
+            <a:schemeClr val="accent1"/>
+          </a:effectRef>
+          <a:fontRef idx="minor">
+            <a:schemeClr val="lt1"/>
+          </a:fontRef>
+        </p:style>
+        <p:txBody>
+          <a:bodyPr rtlCol="0" anchor="ctr"/>
+          <a:lstStyle/>
+          <a:p>
             <a:pPr algn="ctr"/>
           </a:p>
         </p:txBody>
       </p:sp>
       <p:sp>
         <p:nvSpPr>
-          <p:cNvPr id="8" name="Rectangle 7"/>
+          <p:cNvPr id="9" name="Rectangle 8"/>
+          <p:cNvSpPr/>
+          <p:nvPr/>
+        </p:nvSpPr>
+        <p:spPr>
+          <a:xfrm>
+            <a:off x="3221619" y="3981690"/>
+            <a:ext cx="3028709" cy="212527"/>
+          </a:xfrm>
+          <a:prstGeom prst="rect">
+            <a:avLst/>
+          </a:prstGeom>
+        </p:spPr>
+        <p:style>
+          <a:lnRef idx="1">
+            <a:schemeClr val="accent1"/>
+          </a:lnRef>
+          <a:fillRef idx="3">
+            <a:schemeClr val="accent1"/>
+          </a:fillRef>
+          <a:effectRef idx="2">
+            <a:schemeClr val="accent1"/>
+          </a:effectRef>
+          <a:fontRef idx="minor">
+            <a:schemeClr val="lt1"/>
+          </a:fontRef>
+        </p:style>
+        <p:txBody>
+          <a:bodyPr rtlCol="0" anchor="ctr"/>
+          <a:lstStyle/>
+          <a:p>
+            <a:pPr algn="ctr"/>
+          </a:p>
+        </p:txBody>
+      </p:sp>
+      <p:sp>
+        <p:nvSpPr>
+          <p:cNvPr id="10" name="Rectangle 9"/>
           <p:cNvSpPr/>
           <p:nvPr/>
         </p:nvSpPr>

--- a/examples/recreations/24_Dropbox_technology__HCCS_PrinterInstall_20180206_r0/out_mat2ppt.pptx
+++ b/examples/recreations/24_Dropbox_technology__HCCS_PrinterInstall_20180206_r0/out_mat2ppt.pptx
@@ -3238,57 +3238,9 @@
         <p:nvPr/>
       </p:nvGrpSpPr>
       <p:grpSpPr/>
-      <p:pic>
-        <p:nvPicPr>
-          <p:cNvPr id="2" name="Picture 1" descr="image2.jpeg"/>
-          <p:cNvPicPr>
-            <a:picLocks noChangeAspect="1"/>
-          </p:cNvPicPr>
-          <p:nvPr/>
-        </p:nvPicPr>
-        <p:blipFill>
-          <a:blip r:embed="rId2"/>
-          <a:stretch>
-            <a:fillRect/>
-          </a:stretch>
-        </p:blipFill>
-        <p:spPr>
-          <a:xfrm>
-            <a:off x="188120" y="5525927"/>
-            <a:ext cx="1143000" cy="1224229"/>
-          </a:xfrm>
-          <a:prstGeom prst="rect">
-            <a:avLst/>
-          </a:prstGeom>
-        </p:spPr>
-      </p:pic>
-      <p:pic>
-        <p:nvPicPr>
-          <p:cNvPr id="3" name="Picture 2" descr="image3.jpg"/>
-          <p:cNvPicPr>
-            <a:picLocks noChangeAspect="1"/>
-          </p:cNvPicPr>
-          <p:nvPr/>
-        </p:nvPicPr>
-        <p:blipFill>
-          <a:blip r:embed="rId3"/>
-          <a:stretch>
-            <a:fillRect/>
-          </a:stretch>
-        </p:blipFill>
-        <p:spPr>
-          <a:xfrm>
-            <a:off x="10638880" y="139366"/>
-            <a:ext cx="1410420" cy="1371600"/>
-          </a:xfrm>
-          <a:prstGeom prst="rect">
-            <a:avLst/>
-          </a:prstGeom>
-        </p:spPr>
-      </p:pic>
-      <p:sp>
-        <p:nvSpPr>
-          <p:cNvPr id="4" name="Rectangle 3"/>
+      <p:sp>
+        <p:nvSpPr>
+          <p:cNvPr id="2" name="Rectangle 1"/>
           <p:cNvSpPr/>
           <p:nvPr/>
         </p:nvSpPr>
@@ -3327,7 +3279,7 @@
       </p:sp>
       <p:sp>
         <p:nvSpPr>
-          <p:cNvPr id="5" name="Rectangle 4"/>
+          <p:cNvPr id="3" name="Rectangle 2"/>
           <p:cNvSpPr/>
           <p:nvPr/>
         </p:nvSpPr>
@@ -3382,57 +3334,9 @@
         <p:nvPr/>
       </p:nvGrpSpPr>
       <p:grpSpPr/>
-      <p:pic>
-        <p:nvPicPr>
-          <p:cNvPr id="2" name="Picture 1" descr="image2.jpeg"/>
-          <p:cNvPicPr>
-            <a:picLocks noChangeAspect="1"/>
-          </p:cNvPicPr>
-          <p:nvPr/>
-        </p:nvPicPr>
-        <p:blipFill>
-          <a:blip r:embed="rId2"/>
-          <a:stretch>
-            <a:fillRect/>
-          </a:stretch>
-        </p:blipFill>
-        <p:spPr>
-          <a:xfrm>
-            <a:off x="188120" y="5525927"/>
-            <a:ext cx="1143000" cy="1224229"/>
-          </a:xfrm>
-          <a:prstGeom prst="rect">
-            <a:avLst/>
-          </a:prstGeom>
-        </p:spPr>
-      </p:pic>
-      <p:pic>
-        <p:nvPicPr>
-          <p:cNvPr id="3" name="Picture 2" descr="image3.jpg"/>
-          <p:cNvPicPr>
-            <a:picLocks noChangeAspect="1"/>
-          </p:cNvPicPr>
-          <p:nvPr/>
-        </p:nvPicPr>
-        <p:blipFill>
-          <a:blip r:embed="rId3"/>
-          <a:stretch>
-            <a:fillRect/>
-          </a:stretch>
-        </p:blipFill>
-        <p:spPr>
-          <a:xfrm>
-            <a:off x="10638880" y="139366"/>
-            <a:ext cx="1410420" cy="1371600"/>
-          </a:xfrm>
-          <a:prstGeom prst="rect">
-            <a:avLst/>
-          </a:prstGeom>
-        </p:spPr>
-      </p:pic>
-      <p:sp>
-        <p:nvSpPr>
-          <p:cNvPr id="4" name="Rectangle 3"/>
+      <p:sp>
+        <p:nvSpPr>
+          <p:cNvPr id="2" name="Rectangle 1"/>
           <p:cNvSpPr/>
           <p:nvPr/>
         </p:nvSpPr>
@@ -3471,7 +3375,7 @@
       </p:sp>
       <p:sp>
         <p:nvSpPr>
-          <p:cNvPr id="5" name="Rectangle 4"/>
+          <p:cNvPr id="3" name="Rectangle 2"/>
           <p:cNvSpPr/>
           <p:nvPr/>
         </p:nvSpPr>
@@ -3526,57 +3430,9 @@
         <p:nvPr/>
       </p:nvGrpSpPr>
       <p:grpSpPr/>
-      <p:pic>
-        <p:nvPicPr>
-          <p:cNvPr id="2" name="Picture 1" descr="image2.jpeg"/>
-          <p:cNvPicPr>
-            <a:picLocks noChangeAspect="1"/>
-          </p:cNvPicPr>
-          <p:nvPr/>
-        </p:nvPicPr>
-        <p:blipFill>
-          <a:blip r:embed="rId2"/>
-          <a:stretch>
-            <a:fillRect/>
-          </a:stretch>
-        </p:blipFill>
-        <p:spPr>
-          <a:xfrm>
-            <a:off x="188120" y="5525927"/>
-            <a:ext cx="1143000" cy="1224229"/>
-          </a:xfrm>
-          <a:prstGeom prst="rect">
-            <a:avLst/>
-          </a:prstGeom>
-        </p:spPr>
-      </p:pic>
-      <p:pic>
-        <p:nvPicPr>
-          <p:cNvPr id="3" name="Picture 2" descr="image3.jpg"/>
-          <p:cNvPicPr>
-            <a:picLocks noChangeAspect="1"/>
-          </p:cNvPicPr>
-          <p:nvPr/>
-        </p:nvPicPr>
-        <p:blipFill>
-          <a:blip r:embed="rId3"/>
-          <a:stretch>
-            <a:fillRect/>
-          </a:stretch>
-        </p:blipFill>
-        <p:spPr>
-          <a:xfrm>
-            <a:off x="10638880" y="139366"/>
-            <a:ext cx="1410420" cy="1371600"/>
-          </a:xfrm>
-          <a:prstGeom prst="rect">
-            <a:avLst/>
-          </a:prstGeom>
-        </p:spPr>
-      </p:pic>
-      <p:sp>
-        <p:nvSpPr>
-          <p:cNvPr id="4" name="Rectangle 3"/>
+      <p:sp>
+        <p:nvSpPr>
+          <p:cNvPr id="2" name="Rectangle 1"/>
           <p:cNvSpPr/>
           <p:nvPr/>
         </p:nvSpPr>
@@ -3615,7 +3471,7 @@
       </p:sp>
       <p:sp>
         <p:nvSpPr>
-          <p:cNvPr id="5" name="Rectangle 4"/>
+          <p:cNvPr id="3" name="Rectangle 2"/>
           <p:cNvSpPr/>
           <p:nvPr/>
         </p:nvSpPr>
@@ -3670,9 +3526,87 @@
         <p:nvPr/>
       </p:nvGrpSpPr>
       <p:grpSpPr/>
+      <p:sp>
+        <p:nvSpPr>
+          <p:cNvPr id="2" name="Rectangle 1"/>
+          <p:cNvSpPr/>
+          <p:nvPr/>
+        </p:nvSpPr>
+        <p:spPr>
+          <a:xfrm>
+            <a:off x="535021" y="365125"/>
+            <a:ext cx="10032665" cy="659559"/>
+          </a:xfrm>
+          <a:prstGeom prst="rect">
+            <a:avLst/>
+          </a:prstGeom>
+        </p:spPr>
+        <p:style>
+          <a:lnRef idx="1">
+            <a:schemeClr val="accent1"/>
+          </a:lnRef>
+          <a:fillRef idx="3">
+            <a:schemeClr val="accent1"/>
+          </a:fillRef>
+          <a:effectRef idx="2">
+            <a:schemeClr val="accent1"/>
+          </a:effectRef>
+          <a:fontRef idx="minor">
+            <a:schemeClr val="lt1"/>
+          </a:fontRef>
+        </p:style>
+        <p:txBody>
+          <a:bodyPr rtlCol="0" anchor="ctr"/>
+          <a:lstStyle/>
+          <a:p>
+            <a:r>
+              <a:t>Installing a Network Printer Using TCP/IP (2/4)</a:t>
+            </a:r>
+          </a:p>
+        </p:txBody>
+      </p:sp>
+      <p:sp>
+        <p:nvSpPr>
+          <p:cNvPr id="3" name="Rectangle 2"/>
+          <p:cNvSpPr/>
+          <p:nvPr/>
+        </p:nvSpPr>
+        <p:spPr>
+          <a:xfrm>
+            <a:off x="188121" y="1222110"/>
+            <a:ext cx="11651454" cy="4954853"/>
+          </a:xfrm>
+          <a:prstGeom prst="rect">
+            <a:avLst/>
+          </a:prstGeom>
+        </p:spPr>
+        <p:style>
+          <a:lnRef idx="1">
+            <a:schemeClr val="accent1"/>
+          </a:lnRef>
+          <a:fillRef idx="3">
+            <a:schemeClr val="accent1"/>
+          </a:fillRef>
+          <a:effectRef idx="2">
+            <a:schemeClr val="accent1"/>
+          </a:effectRef>
+          <a:fontRef idx="minor">
+            <a:schemeClr val="lt1"/>
+          </a:fontRef>
+        </p:style>
+        <p:txBody>
+          <a:bodyPr rtlCol="0" anchor="ctr"/>
+          <a:lstStyle/>
+          <a:p>
+            <a:r>
+              <a:t>Control Panel -&gt; Devices and printersAdd a printer Add a Local Printer</a:t>
+            </a:r>
+          </a:p>
+        </p:txBody>
+      </p:sp>
       <p:pic>
         <p:nvPicPr>
-          <p:cNvPr id="2" name="Picture 1" descr="image2.jpeg"/>
+          <p:cNvPr id="4" name="Picture 3" descr="image4.png"/>
           <p:cNvPicPr>
             <a:picLocks noChangeAspect="1"/>
           </p:cNvPicPr>
@@ -3686,143 +3620,17 @@
         </p:blipFill>
         <p:spPr>
           <a:xfrm>
-            <a:off x="188120" y="5525927"/>
-            <a:ext cx="1143000" cy="1224229"/>
+            <a:off x="4442569" y="2920610"/>
+            <a:ext cx="6390009" cy="4244119"/>
           </a:xfrm>
           <a:prstGeom prst="rect">
             <a:avLst/>
           </a:prstGeom>
         </p:spPr>
       </p:pic>
-      <p:pic>
-        <p:nvPicPr>
-          <p:cNvPr id="3" name="Picture 2" descr="image3.jpg"/>
-          <p:cNvPicPr>
-            <a:picLocks noChangeAspect="1"/>
-          </p:cNvPicPr>
-          <p:nvPr/>
-        </p:nvPicPr>
-        <p:blipFill>
-          <a:blip r:embed="rId3"/>
-          <a:stretch>
-            <a:fillRect/>
-          </a:stretch>
-        </p:blipFill>
-        <p:spPr>
-          <a:xfrm>
-            <a:off x="10638880" y="139366"/>
-            <a:ext cx="1410420" cy="1371600"/>
-          </a:xfrm>
-          <a:prstGeom prst="rect">
-            <a:avLst/>
-          </a:prstGeom>
-        </p:spPr>
-      </p:pic>
-      <p:sp>
-        <p:nvSpPr>
-          <p:cNvPr id="4" name="Rectangle 3"/>
-          <p:cNvSpPr/>
-          <p:nvPr/>
-        </p:nvSpPr>
-        <p:spPr>
-          <a:xfrm>
-            <a:off x="535021" y="365125"/>
-            <a:ext cx="10032665" cy="659559"/>
-          </a:xfrm>
-          <a:prstGeom prst="rect">
-            <a:avLst/>
-          </a:prstGeom>
-        </p:spPr>
-        <p:style>
-          <a:lnRef idx="1">
-            <a:schemeClr val="accent1"/>
-          </a:lnRef>
-          <a:fillRef idx="3">
-            <a:schemeClr val="accent1"/>
-          </a:fillRef>
-          <a:effectRef idx="2">
-            <a:schemeClr val="accent1"/>
-          </a:effectRef>
-          <a:fontRef idx="minor">
-            <a:schemeClr val="lt1"/>
-          </a:fontRef>
-        </p:style>
-        <p:txBody>
-          <a:bodyPr rtlCol="0" anchor="ctr"/>
-          <a:lstStyle/>
-          <a:p>
-            <a:r>
-              <a:t>Installing a Network Printer Using TCP/IP (2/4)</a:t>
-            </a:r>
-          </a:p>
-        </p:txBody>
-      </p:sp>
       <p:sp>
         <p:nvSpPr>
           <p:cNvPr id="5" name="Rectangle 4"/>
-          <p:cNvSpPr/>
-          <p:nvPr/>
-        </p:nvSpPr>
-        <p:spPr>
-          <a:xfrm>
-            <a:off x="188121" y="1222110"/>
-            <a:ext cx="11651454" cy="4954853"/>
-          </a:xfrm>
-          <a:prstGeom prst="rect">
-            <a:avLst/>
-          </a:prstGeom>
-        </p:spPr>
-        <p:style>
-          <a:lnRef idx="1">
-            <a:schemeClr val="accent1"/>
-          </a:lnRef>
-          <a:fillRef idx="3">
-            <a:schemeClr val="accent1"/>
-          </a:fillRef>
-          <a:effectRef idx="2">
-            <a:schemeClr val="accent1"/>
-          </a:effectRef>
-          <a:fontRef idx="minor">
-            <a:schemeClr val="lt1"/>
-          </a:fontRef>
-        </p:style>
-        <p:txBody>
-          <a:bodyPr rtlCol="0" anchor="ctr"/>
-          <a:lstStyle/>
-          <a:p>
-            <a:r>
-              <a:t>Control Panel -&gt; Devices and printersAdd a printer Add a Local Printer</a:t>
-            </a:r>
-          </a:p>
-        </p:txBody>
-      </p:sp>
-      <p:pic>
-        <p:nvPicPr>
-          <p:cNvPr id="6" name="Picture 5" descr="image4.png"/>
-          <p:cNvPicPr>
-            <a:picLocks noChangeAspect="1"/>
-          </p:cNvPicPr>
-          <p:nvPr/>
-        </p:nvPicPr>
-        <p:blipFill>
-          <a:blip r:embed="rId4"/>
-          <a:stretch>
-            <a:fillRect/>
-          </a:stretch>
-        </p:blipFill>
-        <p:spPr>
-          <a:xfrm>
-            <a:off x="4442569" y="2920610"/>
-            <a:ext cx="6390009" cy="4244119"/>
-          </a:xfrm>
-          <a:prstGeom prst="rect">
-            <a:avLst/>
-          </a:prstGeom>
-        </p:spPr>
-      </p:pic>
-      <p:sp>
-        <p:nvSpPr>
-          <p:cNvPr id="7" name="Rectangle 6"/>
           <p:cNvSpPr/>
           <p:nvPr/>
         </p:nvSpPr>
@@ -3875,9 +3683,87 @@
         <p:nvPr/>
       </p:nvGrpSpPr>
       <p:grpSpPr/>
+      <p:sp>
+        <p:nvSpPr>
+          <p:cNvPr id="2" name="Rectangle 1"/>
+          <p:cNvSpPr/>
+          <p:nvPr/>
+        </p:nvSpPr>
+        <p:spPr>
+          <a:xfrm>
+            <a:off x="535021" y="365125"/>
+            <a:ext cx="10090538" cy="659559"/>
+          </a:xfrm>
+          <a:prstGeom prst="rect">
+            <a:avLst/>
+          </a:prstGeom>
+        </p:spPr>
+        <p:style>
+          <a:lnRef idx="1">
+            <a:schemeClr val="accent1"/>
+          </a:lnRef>
+          <a:fillRef idx="3">
+            <a:schemeClr val="accent1"/>
+          </a:fillRef>
+          <a:effectRef idx="2">
+            <a:schemeClr val="accent1"/>
+          </a:effectRef>
+          <a:fontRef idx="minor">
+            <a:schemeClr val="lt1"/>
+          </a:fontRef>
+        </p:style>
+        <p:txBody>
+          <a:bodyPr rtlCol="0" anchor="ctr"/>
+          <a:lstStyle/>
+          <a:p>
+            <a:r>
+              <a:t>Installing a Network Printer Using TCP/IP (3/4)</a:t>
+            </a:r>
+          </a:p>
+        </p:txBody>
+      </p:sp>
+      <p:sp>
+        <p:nvSpPr>
+          <p:cNvPr id="3" name="Rectangle 2"/>
+          <p:cNvSpPr/>
+          <p:nvPr/>
+        </p:nvSpPr>
+        <p:spPr>
+          <a:xfrm>
+            <a:off x="188121" y="1222110"/>
+            <a:ext cx="11651454" cy="4954853"/>
+          </a:xfrm>
+          <a:prstGeom prst="rect">
+            <a:avLst/>
+          </a:prstGeom>
+        </p:spPr>
+        <p:style>
+          <a:lnRef idx="1">
+            <a:schemeClr val="accent1"/>
+          </a:lnRef>
+          <a:fillRef idx="3">
+            <a:schemeClr val="accent1"/>
+          </a:fillRef>
+          <a:effectRef idx="2">
+            <a:schemeClr val="accent1"/>
+          </a:effectRef>
+          <a:fontRef idx="minor">
+            <a:schemeClr val="lt1"/>
+          </a:fontRef>
+        </p:style>
+        <p:txBody>
+          <a:bodyPr rtlCol="0" anchor="ctr"/>
+          <a:lstStyle/>
+          <a:p>
+            <a:r>
+              <a:t>Add a Local PrinterCreate a New PortSelect Type of Port: Standard TCP/IP Port</a:t>
+            </a:r>
+          </a:p>
+        </p:txBody>
+      </p:sp>
       <p:pic>
         <p:nvPicPr>
-          <p:cNvPr id="2" name="Picture 1" descr="image2.jpeg"/>
+          <p:cNvPr id="4" name="Picture 3" descr="image5.png"/>
           <p:cNvPicPr>
             <a:picLocks noChangeAspect="1"/>
           </p:cNvPicPr>
@@ -3891,8 +3777,8 @@
         </p:blipFill>
         <p:spPr>
           <a:xfrm>
-            <a:off x="188120" y="5525927"/>
-            <a:ext cx="1143000" cy="1224229"/>
+            <a:off x="1829470" y="2597969"/>
+            <a:ext cx="4593021" cy="3364315"/>
           </a:xfrm>
           <a:prstGeom prst="rect">
             <a:avLst/>
@@ -3901,7 +3787,7 @@
       </p:pic>
       <p:pic>
         <p:nvPicPr>
-          <p:cNvPr id="3" name="Picture 2" descr="image3.jpg"/>
+          <p:cNvPr id="5" name="Picture 4" descr="image6.png"/>
           <p:cNvPicPr>
             <a:picLocks noChangeAspect="1"/>
           </p:cNvPicPr>
@@ -3909,132 +3795,6 @@
         </p:nvPicPr>
         <p:blipFill>
           <a:blip r:embed="rId3"/>
-          <a:stretch>
-            <a:fillRect/>
-          </a:stretch>
-        </p:blipFill>
-        <p:spPr>
-          <a:xfrm>
-            <a:off x="10638880" y="139366"/>
-            <a:ext cx="1410420" cy="1371600"/>
-          </a:xfrm>
-          <a:prstGeom prst="rect">
-            <a:avLst/>
-          </a:prstGeom>
-        </p:spPr>
-      </p:pic>
-      <p:sp>
-        <p:nvSpPr>
-          <p:cNvPr id="4" name="Rectangle 3"/>
-          <p:cNvSpPr/>
-          <p:nvPr/>
-        </p:nvSpPr>
-        <p:spPr>
-          <a:xfrm>
-            <a:off x="535021" y="365125"/>
-            <a:ext cx="10090538" cy="659559"/>
-          </a:xfrm>
-          <a:prstGeom prst="rect">
-            <a:avLst/>
-          </a:prstGeom>
-        </p:spPr>
-        <p:style>
-          <a:lnRef idx="1">
-            <a:schemeClr val="accent1"/>
-          </a:lnRef>
-          <a:fillRef idx="3">
-            <a:schemeClr val="accent1"/>
-          </a:fillRef>
-          <a:effectRef idx="2">
-            <a:schemeClr val="accent1"/>
-          </a:effectRef>
-          <a:fontRef idx="minor">
-            <a:schemeClr val="lt1"/>
-          </a:fontRef>
-        </p:style>
-        <p:txBody>
-          <a:bodyPr rtlCol="0" anchor="ctr"/>
-          <a:lstStyle/>
-          <a:p>
-            <a:r>
-              <a:t>Installing a Network Printer Using TCP/IP (3/4)</a:t>
-            </a:r>
-          </a:p>
-        </p:txBody>
-      </p:sp>
-      <p:sp>
-        <p:nvSpPr>
-          <p:cNvPr id="5" name="Rectangle 4"/>
-          <p:cNvSpPr/>
-          <p:nvPr/>
-        </p:nvSpPr>
-        <p:spPr>
-          <a:xfrm>
-            <a:off x="188121" y="1222110"/>
-            <a:ext cx="11651454" cy="4954853"/>
-          </a:xfrm>
-          <a:prstGeom prst="rect">
-            <a:avLst/>
-          </a:prstGeom>
-        </p:spPr>
-        <p:style>
-          <a:lnRef idx="1">
-            <a:schemeClr val="accent1"/>
-          </a:lnRef>
-          <a:fillRef idx="3">
-            <a:schemeClr val="accent1"/>
-          </a:fillRef>
-          <a:effectRef idx="2">
-            <a:schemeClr val="accent1"/>
-          </a:effectRef>
-          <a:fontRef idx="minor">
-            <a:schemeClr val="lt1"/>
-          </a:fontRef>
-        </p:style>
-        <p:txBody>
-          <a:bodyPr rtlCol="0" anchor="ctr"/>
-          <a:lstStyle/>
-          <a:p>
-            <a:r>
-              <a:t>Add a Local PrinterCreate a New PortSelect Type of Port: Standard TCP/IP Port</a:t>
-            </a:r>
-          </a:p>
-        </p:txBody>
-      </p:sp>
-      <p:pic>
-        <p:nvPicPr>
-          <p:cNvPr id="6" name="Picture 5" descr="image5.png"/>
-          <p:cNvPicPr>
-            <a:picLocks noChangeAspect="1"/>
-          </p:cNvPicPr>
-          <p:nvPr/>
-        </p:nvPicPr>
-        <p:blipFill>
-          <a:blip r:embed="rId4"/>
-          <a:stretch>
-            <a:fillRect/>
-          </a:stretch>
-        </p:blipFill>
-        <p:spPr>
-          <a:xfrm>
-            <a:off x="1829470" y="2597969"/>
-            <a:ext cx="4593021" cy="3364315"/>
-          </a:xfrm>
-          <a:prstGeom prst="rect">
-            <a:avLst/>
-          </a:prstGeom>
-        </p:spPr>
-      </p:pic>
-      <p:pic>
-        <p:nvPicPr>
-          <p:cNvPr id="7" name="Picture 6" descr="image6.png"/>
-          <p:cNvPicPr>
-            <a:picLocks noChangeAspect="1"/>
-          </p:cNvPicPr>
-          <p:nvPr/>
-        </p:nvPicPr>
-        <p:blipFill>
-          <a:blip r:embed="rId5"/>
           <a:stretch>
             <a:fillRect/>
           </a:stretch>
@@ -4067,9 +3827,87 @@
         <p:nvPr/>
       </p:nvGrpSpPr>
       <p:grpSpPr/>
+      <p:sp>
+        <p:nvSpPr>
+          <p:cNvPr id="2" name="Rectangle 1"/>
+          <p:cNvSpPr/>
+          <p:nvPr/>
+        </p:nvSpPr>
+        <p:spPr>
+          <a:xfrm>
+            <a:off x="535021" y="365125"/>
+            <a:ext cx="10021090" cy="659559"/>
+          </a:xfrm>
+          <a:prstGeom prst="rect">
+            <a:avLst/>
+          </a:prstGeom>
+        </p:spPr>
+        <p:style>
+          <a:lnRef idx="1">
+            <a:schemeClr val="accent1"/>
+          </a:lnRef>
+          <a:fillRef idx="3">
+            <a:schemeClr val="accent1"/>
+          </a:fillRef>
+          <a:effectRef idx="2">
+            <a:schemeClr val="accent1"/>
+          </a:effectRef>
+          <a:fontRef idx="minor">
+            <a:schemeClr val="lt1"/>
+          </a:fontRef>
+        </p:style>
+        <p:txBody>
+          <a:bodyPr rtlCol="0" anchor="ctr"/>
+          <a:lstStyle/>
+          <a:p>
+            <a:r>
+              <a:t>Installing a Network Printer Using TCP/IP (4/4)</a:t>
+            </a:r>
+          </a:p>
+        </p:txBody>
+      </p:sp>
+      <p:sp>
+        <p:nvSpPr>
+          <p:cNvPr id="3" name="Rectangle 2"/>
+          <p:cNvSpPr/>
+          <p:nvPr/>
+        </p:nvSpPr>
+        <p:spPr>
+          <a:xfrm>
+            <a:off x="188121" y="1222110"/>
+            <a:ext cx="11651454" cy="4954853"/>
+          </a:xfrm>
+          <a:prstGeom prst="rect">
+            <a:avLst/>
+          </a:prstGeom>
+        </p:spPr>
+        <p:style>
+          <a:lnRef idx="1">
+            <a:schemeClr val="accent1"/>
+          </a:lnRef>
+          <a:fillRef idx="3">
+            <a:schemeClr val="accent1"/>
+          </a:fillRef>
+          <a:effectRef idx="2">
+            <a:schemeClr val="accent1"/>
+          </a:effectRef>
+          <a:fontRef idx="minor">
+            <a:schemeClr val="lt1"/>
+          </a:fontRef>
+        </p:style>
+        <p:txBody>
+          <a:bodyPr rtlCol="0" anchor="ctr"/>
+          <a:lstStyle/>
+          <a:p>
+            <a:r>
+              <a:t>Type IP Address in Hostname or IP address: 192.168.1.##Installing the Printer Driver Add Printer -&gt; Have Disk</a:t>
+            </a:r>
+          </a:p>
+        </p:txBody>
+      </p:sp>
       <p:pic>
         <p:nvPicPr>
-          <p:cNvPr id="2" name="Picture 1" descr="image2.jpeg"/>
+          <p:cNvPr id="4" name="Picture 3" descr="image7.png"/>
           <p:cNvPicPr>
             <a:picLocks noChangeAspect="1"/>
           </p:cNvPicPr>
@@ -4083,8 +3921,8 @@
         </p:blipFill>
         <p:spPr>
           <a:xfrm>
-            <a:off x="188120" y="5525927"/>
-            <a:ext cx="1143000" cy="1224229"/>
+            <a:off x="1452793" y="2338086"/>
+            <a:ext cx="4994305" cy="3658249"/>
           </a:xfrm>
           <a:prstGeom prst="rect">
             <a:avLst/>
@@ -4093,7 +3931,7 @@
       </p:pic>
       <p:pic>
         <p:nvPicPr>
-          <p:cNvPr id="3" name="Picture 2" descr="image3.jpg"/>
+          <p:cNvPr id="5" name="Picture 4" descr="image8.png"/>
           <p:cNvPicPr>
             <a:picLocks noChangeAspect="1"/>
           </p:cNvPicPr>
@@ -4107,8 +3945,8 @@
         </p:blipFill>
         <p:spPr>
           <a:xfrm>
-            <a:off x="10638880" y="139366"/>
-            <a:ext cx="1410420" cy="1371600"/>
+            <a:off x="6744113" y="2338086"/>
+            <a:ext cx="4994305" cy="3658249"/>
           </a:xfrm>
           <a:prstGeom prst="rect">
             <a:avLst/>
@@ -4117,14 +3955,14 @@
       </p:pic>
       <p:sp>
         <p:nvSpPr>
-          <p:cNvPr id="4" name="Rectangle 3"/>
+          <p:cNvPr id="6" name="Rectangle 5"/>
           <p:cNvSpPr/>
           <p:nvPr/>
         </p:nvSpPr>
         <p:spPr>
           <a:xfrm>
-            <a:off x="535021" y="365125"/>
-            <a:ext cx="10021090" cy="659559"/>
+            <a:off x="10556111" y="5023414"/>
+            <a:ext cx="983848" cy="289366"/>
           </a:xfrm>
           <a:prstGeom prst="rect">
             <a:avLst/>
@@ -4148,22 +3986,20 @@
           <a:bodyPr rtlCol="0" anchor="ctr"/>
           <a:lstStyle/>
           <a:p>
-            <a:r>
-              <a:t>Installing a Network Printer Using TCP/IP (4/4)</a:t>
-            </a:r>
-          </a:p>
-        </p:txBody>
-      </p:sp>
-      <p:sp>
-        <p:nvSpPr>
-          <p:cNvPr id="5" name="Rectangle 4"/>
+            <a:pPr algn="ctr"/>
+          </a:p>
+        </p:txBody>
+      </p:sp>
+      <p:sp>
+        <p:nvSpPr>
+          <p:cNvPr id="7" name="Rectangle 6"/>
           <p:cNvSpPr/>
           <p:nvPr/>
         </p:nvSpPr>
         <p:spPr>
           <a:xfrm>
-            <a:off x="188121" y="1222110"/>
-            <a:ext cx="11651454" cy="4954853"/>
+            <a:off x="3221619" y="3981690"/>
+            <a:ext cx="3028709" cy="212527"/>
           </a:xfrm>
           <a:prstGeom prst="rect">
             <a:avLst/>
@@ -4187,137 +4023,13 @@
           <a:bodyPr rtlCol="0" anchor="ctr"/>
           <a:lstStyle/>
           <a:p>
-            <a:r>
-              <a:t>Type IP Address in Hostname or IP address: 192.168.1.##Installing the Printer Driver Add Printer -&gt; Have Disk</a:t>
-            </a:r>
-          </a:p>
-        </p:txBody>
-      </p:sp>
-      <p:pic>
-        <p:nvPicPr>
-          <p:cNvPr id="6" name="Picture 5" descr="image7.png"/>
-          <p:cNvPicPr>
-            <a:picLocks noChangeAspect="1"/>
-          </p:cNvPicPr>
-          <p:nvPr/>
-        </p:nvPicPr>
-        <p:blipFill>
-          <a:blip r:embed="rId4"/>
-          <a:stretch>
-            <a:fillRect/>
-          </a:stretch>
-        </p:blipFill>
-        <p:spPr>
-          <a:xfrm>
-            <a:off x="1452793" y="2338086"/>
-            <a:ext cx="4994305" cy="3658249"/>
-          </a:xfrm>
-          <a:prstGeom prst="rect">
-            <a:avLst/>
-          </a:prstGeom>
-        </p:spPr>
-      </p:pic>
-      <p:pic>
-        <p:nvPicPr>
-          <p:cNvPr id="7" name="Picture 6" descr="image8.png"/>
-          <p:cNvPicPr>
-            <a:picLocks noChangeAspect="1"/>
-          </p:cNvPicPr>
-          <p:nvPr/>
-        </p:nvPicPr>
-        <p:blipFill>
-          <a:blip r:embed="rId5"/>
-          <a:stretch>
-            <a:fillRect/>
-          </a:stretch>
-        </p:blipFill>
-        <p:spPr>
-          <a:xfrm>
-            <a:off x="6744113" y="2338086"/>
-            <a:ext cx="4994305" cy="3658249"/>
-          </a:xfrm>
-          <a:prstGeom prst="rect">
-            <a:avLst/>
-          </a:prstGeom>
-        </p:spPr>
-      </p:pic>
+            <a:pPr algn="ctr"/>
+          </a:p>
+        </p:txBody>
+      </p:sp>
       <p:sp>
         <p:nvSpPr>
           <p:cNvPr id="8" name="Rectangle 7"/>
-          <p:cNvSpPr/>
-          <p:nvPr/>
-        </p:nvSpPr>
-        <p:spPr>
-          <a:xfrm>
-            <a:off x="10556111" y="5023414"/>
-            <a:ext cx="983848" cy="289366"/>
-          </a:xfrm>
-          <a:prstGeom prst="rect">
-            <a:avLst/>
-          </a:prstGeom>
-        </p:spPr>
-        <p:style>
-          <a:lnRef idx="1">
-            <a:schemeClr val="accent1"/>
-          </a:lnRef>
-          <a:fillRef idx="3">
-            <a:schemeClr val="accent1"/>
-          </a:fillRef>
-          <a:effectRef idx="2">
-            <a:schemeClr val="accent1"/>
-          </a:effectRef>
-          <a:fontRef idx="minor">
-            <a:schemeClr val="lt1"/>
-          </a:fontRef>
-        </p:style>
-        <p:txBody>
-          <a:bodyPr rtlCol="0" anchor="ctr"/>
-          <a:lstStyle/>
-          <a:p>
-            <a:pPr algn="ctr"/>
-          </a:p>
-        </p:txBody>
-      </p:sp>
-      <p:sp>
-        <p:nvSpPr>
-          <p:cNvPr id="9" name="Rectangle 8"/>
-          <p:cNvSpPr/>
-          <p:nvPr/>
-        </p:nvSpPr>
-        <p:spPr>
-          <a:xfrm>
-            <a:off x="3221619" y="3981690"/>
-            <a:ext cx="3028709" cy="212527"/>
-          </a:xfrm>
-          <a:prstGeom prst="rect">
-            <a:avLst/>
-          </a:prstGeom>
-        </p:spPr>
-        <p:style>
-          <a:lnRef idx="1">
-            <a:schemeClr val="accent1"/>
-          </a:lnRef>
-          <a:fillRef idx="3">
-            <a:schemeClr val="accent1"/>
-          </a:fillRef>
-          <a:effectRef idx="2">
-            <a:schemeClr val="accent1"/>
-          </a:effectRef>
-          <a:fontRef idx="minor">
-            <a:schemeClr val="lt1"/>
-          </a:fontRef>
-        </p:style>
-        <p:txBody>
-          <a:bodyPr rtlCol="0" anchor="ctr"/>
-          <a:lstStyle/>
-          <a:p>
-            <a:pPr algn="ctr"/>
-          </a:p>
-        </p:txBody>
-      </p:sp>
-      <p:sp>
-        <p:nvSpPr>
-          <p:cNvPr id="10" name="Rectangle 9"/>
           <p:cNvSpPr/>
           <p:nvPr/>
         </p:nvSpPr>

--- a/examples/recreations/24_Dropbox_technology__HCCS_PrinterInstall_20180206_r0/out_mat2ppt.pptx
+++ b/examples/recreations/24_Dropbox_technology__HCCS_PrinterInstall_20180206_r0/out_mat2ppt.pptx
@@ -3246,8 +3246,8 @@
         </p:nvSpPr>
         <p:spPr>
           <a:xfrm>
-            <a:off x="838200" y="365125"/>
-            <a:ext cx="10515600" cy="1325563"/>
+            <a:off x="535021" y="365125"/>
+            <a:ext cx="9772761" cy="659559"/>
           </a:xfrm>
           <a:prstGeom prst="rect">
             <a:avLst/>
@@ -3285,8 +3285,8 @@
         </p:nvSpPr>
         <p:spPr>
           <a:xfrm>
-            <a:off x="838200" y="365125"/>
-            <a:ext cx="10515600" cy="1325563"/>
+            <a:off x="188121" y="1222110"/>
+            <a:ext cx="11165680" cy="4954853"/>
           </a:xfrm>
           <a:prstGeom prst="rect">
             <a:avLst/>
@@ -3342,8 +3342,8 @@
         </p:nvSpPr>
         <p:spPr>
           <a:xfrm>
-            <a:off x="838200" y="365125"/>
-            <a:ext cx="10515600" cy="1325563"/>
+            <a:off x="535021" y="365125"/>
+            <a:ext cx="9772761" cy="659559"/>
           </a:xfrm>
           <a:prstGeom prst="rect">
             <a:avLst/>
